--- a/M240105042_15_Aug_BizTrack.pptx
+++ b/M240105042_15_Aug_BizTrack.pptx
@@ -15668,7 +15668,7 @@
               <a:buNone/>
             </a:pPr>
             <a:r>
-              <a:rPr b="1">
+              <a:rPr b="1" dirty="0">
                 <a:latin typeface="Arial"/>
                 <a:ea typeface="Arial"/>
                 <a:cs typeface="Arial"/>
@@ -15682,7 +15682,7 @@
               <a:buChar char="§"/>
             </a:pPr>
             <a:r>
-              <a:rPr>
+              <a:rPr dirty="0">
                 <a:latin typeface="Arial"/>
                 <a:ea typeface="Arial"/>
                 <a:cs typeface="Arial"/>
@@ -15696,7 +15696,7 @@
               <a:buChar char="§"/>
             </a:pPr>
             <a:r>
-              <a:rPr>
+              <a:rPr dirty="0">
                 <a:latin typeface="Arial"/>
                 <a:ea typeface="Arial"/>
                 <a:cs typeface="Arial"/>
@@ -15710,7 +15710,7 @@
               <a:buChar char="§"/>
             </a:pPr>
             <a:r>
-              <a:rPr>
+              <a:rPr dirty="0">
                 <a:latin typeface="Arial"/>
                 <a:ea typeface="Arial"/>
                 <a:cs typeface="Arial"/>
@@ -15724,14 +15724,14 @@
               <a:buChar char="§"/>
             </a:pPr>
             <a:r>
-              <a:rPr>
+              <a:rPr dirty="0">
                 <a:latin typeface="Arial"/>
                 <a:ea typeface="Arial"/>
                 <a:cs typeface="Arial"/>
               </a:rPr>
               <a:t>User Acceptance Testing</a:t>
             </a:r>
-            <a:endParaRPr/>
+            <a:endParaRPr dirty="0"/>
           </a:p>
         </p:txBody>
       </p:sp>
@@ -22420,12 +22420,15 @@
         </p:nvPicPr>
         <p:blipFill>
           <a:blip r:embed="rId3"/>
-          <a:stretch/>
+          <a:srcRect l="5218" t="6904" r="9957" b="5154"/>
+          <a:stretch>
+            <a:fillRect/>
+          </a:stretch>
         </p:blipFill>
         <p:spPr>
           <a:xfrm>
-            <a:off x="5930446" y="952500"/>
-            <a:ext cx="4807857" cy="5048250"/>
+            <a:off x="5422391" y="977137"/>
+            <a:ext cx="4697730" cy="5113889"/>
           </a:xfrm>
           <a:prstGeom prst="rect">
             <a:avLst/>
@@ -23014,7 +23017,7 @@
         </p:nvSpPr>
         <p:spPr>
           <a:xfrm>
-            <a:off x="758626" y="1168432"/>
+            <a:off x="511738" y="1168432"/>
             <a:ext cx="6094476" cy="4970591"/>
           </a:xfrm>
           <a:prstGeom prst="rect">
